--- a/lecons/LSA/Geomorphology/19_LSA_GEOMO_FS03_Relief_of_Cameroon.pptx
+++ b/lecons/LSA/Geomorphology/19_LSA_GEOMO_FS03_Relief_of_Cameroon.pptx
@@ -3459,7 +3459,7 @@
           <a:p>
             <a:r>
               <a:rPr lang="en-US" dirty="0"/>
-              <a:t>Before we start the new lesson, let us correct the homework I gave you at the end of Lesson 16: Coastal Processes and Features. The question was: On a map of Cameroon, find Mount Cameroon, the Adamawa Plateau and the Chad Plain. Take out your exercise books.</a:t>
+              <a:t>Before we start the new lesson, let us correct the homework I gave you at the end of Lesson 16: Coastal Processes and Features. The question was: Name the highest mountain of Cameroon. Take out your exercise books.</a:t>
             </a:r>
             <a:endParaRPr lang="en-US" dirty="0"/>
           </a:p>
@@ -4251,7 +4251,7 @@
           <a:p>
             <a:r>
               <a:rPr lang="en-US" dirty="0"/>
-              <a:t>For your homework: Revise the Geomorphology lessons. Draw and label a sketch map of the relief of Cameroon. We shall correct it at the beginning of our next lesson.</a:t>
+              <a:t>For your homework: Define soil. We shall correct it at the beginning of our next lesson.</a:t>
             </a:r>
             <a:endParaRPr lang="en-US" dirty="0"/>
           </a:p>
@@ -4427,7 +4427,7 @@
           <a:p>
             <a:r>
               <a:rPr lang="en-US" dirty="0"/>
-              <a:t>Here is a good answer. Mount Cameroon is on the south-west coast near Buea; the Adamawa Plateau is in the centre (around Ngaoundéré); the Chad Plain is in the far north near Lake Chad. Compare it with your own answer and correct your work in red.</a:t>
+              <a:t>Here is a good answer. Mount Cameroon (4,095 m). Compare it with your own answer and correct your work in red.</a:t>
             </a:r>
             <a:endParaRPr lang="en-US" dirty="0"/>
           </a:p>
@@ -13291,7 +13291,7 @@
               <a:buNone/>
             </a:pPr>
             <a:r>
-              <a:rPr lang="en-US" sz="4000" b="1" dirty="0">
+              <a:rPr lang="en-US" sz="3200" b="1" dirty="0">
                 <a:solidFill>
                   <a:srgbClr val="111111"/>
                 </a:solidFill>
@@ -13301,7 +13301,7 @@
               </a:rPr>
               <a:t>Topic: Denudational Processes on Slopes</a:t>
             </a:r>
-            <a:endParaRPr lang="en-US" sz="4000" dirty="0"/>
+            <a:endParaRPr lang="en-US" sz="3200" dirty="0"/>
           </a:p>
           <a:p>
             <a:pPr algn="l" indent="0" marL="0">
@@ -13311,7 +13311,7 @@
               <a:buNone/>
             </a:pPr>
             <a:r>
-              <a:rPr lang="en-US" sz="4000" b="1" dirty="0">
+              <a:rPr lang="en-US" sz="3200" b="1" dirty="0">
                 <a:solidFill>
                   <a:srgbClr val="111111"/>
                 </a:solidFill>
@@ -13321,7 +13321,7 @@
               </a:rPr>
               <a:t>Sub-topic: Erosion and Depositional Processes and Landforms</a:t>
             </a:r>
-            <a:endParaRPr lang="en-US" sz="4000" dirty="0"/>
+            <a:endParaRPr lang="en-US" sz="3200" dirty="0"/>
           </a:p>
           <a:p>
             <a:pPr algn="l" indent="0" marL="0">
@@ -13331,7 +13331,7 @@
               <a:buNone/>
             </a:pPr>
             <a:r>
-              <a:rPr lang="en-US" sz="4000" b="1" dirty="0">
+              <a:rPr lang="en-US" sz="3200" b="1" dirty="0">
                 <a:solidFill>
                   <a:srgbClr val="990011"/>
                 </a:solidFill>
@@ -13341,7 +13341,7 @@
               </a:rPr>
               <a:t>Further Study 3: Relief of Cameroon</a:t>
             </a:r>
-            <a:endParaRPr lang="en-US" sz="4000" dirty="0"/>
+            <a:endParaRPr lang="en-US" sz="3200" dirty="0"/>
           </a:p>
         </p:txBody>
       </p:sp>
@@ -15012,7 +15012,7 @@
                 <a:ea typeface="Times New Roman" pitchFamily="34" charset="-122"/>
                 <a:cs typeface="Times New Roman" pitchFamily="34" charset="-120"/>
               </a:rPr>
-              <a:t>On a map of Cameroon, find Mount Cameroon, the Adamawa Plateau and the Chad Plain.</a:t>
+              <a:t>Name the highest mountain of Cameroon.</a:t>
             </a:r>
             <a:endParaRPr lang="en-US" sz="4000" dirty="0"/>
           </a:p>
@@ -17157,7 +17157,7 @@
                 <a:ea typeface="Times New Roman" pitchFamily="34" charset="-122"/>
                 <a:cs typeface="Times New Roman" pitchFamily="34" charset="-120"/>
               </a:rPr>
-              <a:t>Revise the Geomorphology lessons. Draw and label a sketch map of the relief of Cameroon.</a:t>
+              <a:t>Define soil.</a:t>
             </a:r>
             <a:endParaRPr lang="en-US" sz="4000" dirty="0"/>
           </a:p>
@@ -17615,7 +17615,7 @@
                 <a:ea typeface="Times New Roman" pitchFamily="34" charset="-122"/>
                 <a:cs typeface="Times New Roman" pitchFamily="34" charset="-120"/>
               </a:rPr>
-              <a:t>Mount Cameroon is on the south-west coast near Buea; the Adamawa Plateau is in the centre (around Ngaoundéré); the Chad Plain is in the far north near Lake Chad.</a:t>
+              <a:t>Mount Cameroon (4,095 m).</a:t>
             </a:r>
             <a:endParaRPr lang="en-US" sz="4000" dirty="0"/>
           </a:p>
@@ -20040,7 +20040,7 @@
                           <a:ea typeface="Calibri" pitchFamily="34" charset="-122"/>
                           <a:cs typeface="Calibri" pitchFamily="34" charset="-120"/>
                         </a:rPr>
-                        <a:t>Revise the Geomorphology lessons. Draw and label a sketch map of the relief of Cameroon.</a:t>
+                        <a:t>Define soil.</a:t>
                       </a:r>
                       <a:endParaRPr lang="en-US" sz="1600" dirty="0">
                         <a:latin typeface="Calibri" charset="0"/>
